--- a/site/lectures/week08-session2.pptx
+++ b/site/lectures/week08-session2.pptx
@@ -2258,12 +2258,6 @@
           <a:p>
             <a:r>
               <a:rPr lang="en-US" dirty="0" b="1"/>
-              <a:t/>
-            </a:r>
-          </a:p>
-          <a:p>
-            <a:r>
-              <a:rPr lang="en-US" dirty="0"/>
               <a:t/>
             </a:r>
           </a:p>
@@ -5853,11 +5847,53 @@
                 <a:solidFill>
                   <a:srgbClr val="18202D"/>
                 </a:solidFill>
-                <a:latin typeface="Calibri" pitchFamily="34" charset="0"/>
-                <a:ea typeface="Calibri" pitchFamily="34" charset="-122"/>
-                <a:cs typeface="Calibri" pitchFamily="34" charset="-120"/>
-              </a:rPr>
-              <a:t>`StudyRoom :&gt; Room` specializes; `studyRooms … subsets rooms`; at least four rooms, because the four study rooms are among the rooms.</a:t>
+                <a:latin typeface="Consolas" pitchFamily="34" charset="0"/>
+                <a:ea typeface="Consolas" pitchFamily="34" charset="-122"/>
+                <a:cs typeface="Consolas" pitchFamily="34" charset="-120"/>
+              </a:rPr>
+              <a:t>StudyRoom :&gt; Room</a:t>
+            </a:r>
+            <a:pPr indent="0" marL="0">
+              <a:buNone/>
+            </a:pPr>
+            <a:r>
+              <a:rPr lang="en-US" sz="1700" dirty="0">
+                <a:solidFill>
+                  <a:srgbClr val="18202D"/>
+                </a:solidFill>
+                <a:latin typeface="Calibri" pitchFamily="34" charset="0"/>
+                <a:ea typeface="Calibri" pitchFamily="34" charset="-122"/>
+                <a:cs typeface="Calibri" pitchFamily="34" charset="-120"/>
+              </a:rPr>
+              <a:t> specializes; </a:t>
+            </a:r>
+            <a:pPr indent="0" marL="0">
+              <a:buNone/>
+            </a:pPr>
+            <a:r>
+              <a:rPr lang="en-US" sz="1700" dirty="0">
+                <a:solidFill>
+                  <a:srgbClr val="18202D"/>
+                </a:solidFill>
+                <a:latin typeface="Consolas" pitchFamily="34" charset="0"/>
+                <a:ea typeface="Consolas" pitchFamily="34" charset="-122"/>
+                <a:cs typeface="Consolas" pitchFamily="34" charset="-120"/>
+              </a:rPr>
+              <a:t>studyRooms … subsets rooms</a:t>
+            </a:r>
+            <a:pPr indent="0" marL="0">
+              <a:buNone/>
+            </a:pPr>
+            <a:r>
+              <a:rPr lang="en-US" sz="1700" dirty="0">
+                <a:solidFill>
+                  <a:srgbClr val="18202D"/>
+                </a:solidFill>
+                <a:latin typeface="Calibri" pitchFamily="34" charset="0"/>
+                <a:ea typeface="Calibri" pitchFamily="34" charset="-122"/>
+                <a:cs typeface="Calibri" pitchFamily="34" charset="-120"/>
+              </a:rPr>
+              <a:t>; at least four rooms, because the four study rooms are among the rooms.</a:t>
             </a:r>
             <a:endParaRPr lang="en-US" sz="1200" dirty="0"/>
           </a:p>
@@ -6061,7 +6097,7 @@
       </p:sp>
       <p:pic>
         <p:nvPicPr>
-          <p:cNvPr id="4" name="Image 0" descr="A root package box labeled 'Model v0.1' with a header strip 'doc: Purpose — who uses this model, for which decisions'. Inside, 11 package tabs in two rows: Context (Week 8, modeled now: the enterprise, the external systems and the context part); Stakeholders (Week 8, modeled now: stakeholders, concerns and stakeholder relationships); Needs (Week 9: the mission, goals and needs; capabilities); Requirements (Week 9: stakeholder and system requirements); Behavior (Week 10: use cases for the scenarios; actions and states); Logical (Week 10: functions and logical elements); Physical (Week 8, modeled now: the system of interest and its parts; components, ports and interfaces); Verification (Week 12: verification cases); Analysis (Week 13: technologies, the trade study and its decision); AROU (Week 13: assumptions, risks, opportunities and unknowns); Evolution (Week 14: the roadmap increments). Packages filled in Week 8 are drawn solid and shaded; the others are drawn with dashed outlines and a small doc label 'filled in Week N'.">    </p:cNvPr>
+          <p:cNvPr id="4" name="Image 0" descr="A root package box labeled 'Model v0.1' with a header strip 'doc: Purpose — who uses this model, for which decisions'. Inside, 11 package folders: a row of large folders for the packages filled in Week 8, drawn solid and shaded, each with what it holds and the label 'Week 8, modeled now'; below them two rows of smaller folders drawn with dashed outlines, each labeled 'filled in Week N'. Every package, with what it holds: Context (Week 8, modeled now: the enterprise, the external systems and the context part); Stakeholders (Week 8, modeled now: stakeholders, concerns and stakeholder relationships); Needs (Week 9: the mission, goals and needs; capabilities); Requirements (Week 9: stakeholder and system requirements); Behavior (Week 10: use cases for the scenarios; actions and states); Logical (Week 10: functions and logical elements); Physical (Week 8, modeled now: the system of interest and its parts; components, ports and interfaces); Verification (Week 12: verification cases); Analysis (Week 13: technologies, the trade study and its decision); AROU (Week 13: assumptions, risks, opportunities and unknowns); Evolution (Week 14: the roadmap increments).">    </p:cNvPr>
           <p:cNvPicPr>
             <a:picLocks noChangeAspect="1"/>
           </p:cNvPicPr>
@@ -6075,8 +6111,8 @@
         </p:blipFill>
         <p:spPr>
           <a:xfrm>
-            <a:off x="548640" y="1981658"/>
-            <a:ext cx="6379289" cy="3008223"/>
+            <a:off x="565761" y="1280160"/>
+            <a:ext cx="6345046" cy="4411218"/>
           </a:xfrm>
           <a:prstGeom prst="rect">
             <a:avLst/>
@@ -6120,7 +6156,21 @@
                 <a:ea typeface="Calibri" pitchFamily="34" charset="-122"/>
                 <a:cs typeface="Calibri" pitchFamily="34" charset="-120"/>
               </a:rPr>
-              <a:t>One root package; the purpose in its `doc`</a:t>
+              <a:t>One root package; the purpose in its </a:t>
+            </a:r>
+            <a:pPr indent="0" marL="0">
+              <a:buNone/>
+            </a:pPr>
+            <a:r>
+              <a:rPr lang="en-US" sz="2000" dirty="0">
+                <a:solidFill>
+                  <a:srgbClr val="18202D"/>
+                </a:solidFill>
+                <a:latin typeface="Consolas" pitchFamily="34" charset="0"/>
+                <a:ea typeface="Consolas" pitchFamily="34" charset="-122"/>
+                <a:cs typeface="Consolas" pitchFamily="34" charset="-120"/>
+              </a:rPr>
+              <a:t>doc</a:t>
             </a:r>
             <a:endParaRPr lang="en-US" sz="2000" dirty="0"/>
           </a:p>
@@ -6270,8 +6320,8 @@
         </p:nvSpPr>
         <p:spPr>
           <a:xfrm>
-            <a:off x="548640" y="5828538"/>
-            <a:ext cx="11094415" cy="435102"/>
+            <a:off x="548640" y="5665851"/>
+            <a:ext cx="11094415" cy="597789"/>
           </a:xfrm>
           <a:prstGeom prst="rect">
             <a:avLst/>
@@ -6309,7 +6359,7 @@
                 <a:ea typeface="Calibri" pitchFamily="34" charset="-122"/>
                 <a:cs typeface="Calibri" pitchFamily="34" charset="-120"/>
               </a:rPr>
-              <a:t>Two concerns with their subject and stakeholders, adapted from the SysML v2 textual-notation training deck. Checked (PASS).</a:t>
+              <a:t>The training deck’s concern “system breakdown” (slide 115, adapted) in the graphical notation: the subject first, then two stakeholder parameters typed by part definitions. Checked (PASS).</a:t>
             </a:r>
             <a:endParaRPr lang="en-US" sz="1050" dirty="0"/>
           </a:p>
@@ -6387,7 +6437,7 @@
       </p:sp>
       <p:pic>
         <p:nvPicPr>
-          <p:cNvPr id="4" name="Image 0" descr="Listing (file sysml/lectures/week08/stakeholders_concerns_adapted.sysml, checked: PASS): package StakeholdersAndConcerns {     part def 'Systems Engineer';     part def 'IV&amp;V';     concern 'system breakdown' {         doc /* To ensure that a system covers all its required capabilities, it is necessary to understand how it is          * broken down into subsystems and components that provide those capabilities. */         subject system;         stakeholder se : 'Systems Engineer';         stakeholder ivv : 'IV&amp;V';     }     concern modularity {         doc /* There should be well defined interfaces between the parts of a system. */         subject system;         stakeholder 'Systems Engineer';     } }">    </p:cNvPr>
+          <p:cNvPr id="4" name="Image 0" descr="Left, a rounded box «concern» 'system breakdown' with two compartments: subject, holding system, marked with badge 1; and stakeholders, holding se : 'Systems Engineer' and ivv : 'IV&amp;V', marked with badge 2. Dashed accent arrows run from the two stakeholder lines to two square-cornered boxes on the right, «part def» 'Systems Engineer' and «part def» 'IV&amp;V'. Notes: 1, the subject comes first, before any stakeholder; 2, stakeholder parameters are part usages, each typed by a part definition.">    </p:cNvPr>
           <p:cNvPicPr>
             <a:picLocks noChangeAspect="1"/>
           </p:cNvPicPr>
@@ -6401,8 +6451,8 @@
         </p:blipFill>
         <p:spPr>
           <a:xfrm>
-            <a:off x="548640" y="1926809"/>
-            <a:ext cx="6379289" cy="3117920"/>
+            <a:off x="548640" y="1818042"/>
+            <a:ext cx="6379289" cy="3172768"/>
           </a:xfrm>
           <a:prstGeom prst="rect">
             <a:avLst/>
@@ -6418,7 +6468,7 @@
         <p:spPr>
           <a:xfrm>
             <a:off x="7293689" y="1280160"/>
-            <a:ext cx="4349366" cy="2089912"/>
+            <a:ext cx="4349366" cy="2802636"/>
           </a:xfrm>
           <a:prstGeom prst="rect">
             <a:avLst/>
@@ -6443,7 +6493,7 @@
         <p:spPr>
           <a:xfrm>
             <a:off x="7293689" y="1280160"/>
-            <a:ext cx="73152" cy="2089912"/>
+            <a:ext cx="73152" cy="2802636"/>
           </a:xfrm>
           <a:prstGeom prst="rect">
             <a:avLst/>
@@ -6468,7 +6518,7 @@
         <p:spPr>
           <a:xfrm>
             <a:off x="7522289" y="1280160"/>
-            <a:ext cx="3983606" cy="2089912"/>
+            <a:ext cx="3983606" cy="2802636"/>
           </a:xfrm>
           <a:prstGeom prst="rect">
             <a:avLst/>
@@ -6484,7 +6534,7 @@
               <a:buNone/>
             </a:pPr>
             <a:r>
-              <a:rPr lang="en-US" sz="900" b="1" spc="100" kern="0" dirty="0">
+              <a:rPr lang="en-US" sz="1300" b="1" spc="100" kern="0" dirty="0">
                 <a:solidFill>
                   <a:srgbClr val="18202D"/>
                 </a:solidFill>
@@ -6494,14 +6544,14 @@
               </a:rPr>
               <a:t>STAKEHOLDER; CONCERN</a:t>
             </a:r>
-            <a:endParaRPr lang="en-US" sz="900" dirty="0"/>
-          </a:p>
-          <a:p>
-            <a:pPr indent="0" marL="0">
-              <a:buNone/>
-            </a:pPr>
-            <a:r>
-              <a:rPr lang="en-US" sz="1600" dirty="0">
+            <a:endParaRPr lang="en-US" sz="1300" dirty="0"/>
+          </a:p>
+          <a:p>
+            <a:pPr indent="0" marL="0">
+              <a:buNone/>
+            </a:pPr>
+            <a:r>
+              <a:rPr lang="en-US" sz="2100" dirty="0">
                 <a:solidFill>
                   <a:srgbClr val="18202D"/>
                 </a:solidFill>
@@ -6511,7 +6561,7 @@
               </a:rPr>
               <a:t>A stakeholder is a person, organization or other entity with concerns to be addressed. A concern is a specific topic that one or more stakeholders desire to be addressed.</a:t>
             </a:r>
-            <a:endParaRPr lang="en-US" sz="900" dirty="0"/>
+            <a:endParaRPr lang="en-US" sz="1300" dirty="0"/>
           </a:p>
           <a:p>
             <a:pPr indent="0" marL="0">
@@ -6521,7 +6571,7 @@
               <a:buNone/>
             </a:pPr>
             <a:r>
-              <a:rPr lang="en-US" sz="800" dirty="0">
+              <a:rPr lang="en-US" sz="1100" dirty="0">
                 <a:solidFill>
                   <a:srgbClr val="0F6E8C"/>
                 </a:solidFill>
@@ -6531,7 +6581,7 @@
               </a:rPr>
               <a:t>R77 · Seidewitz, Intro to the SysML v2 Language: Textual Notation (Release 2026-08), "Metadata", sl.115</a:t>
             </a:r>
-            <a:endParaRPr lang="en-US" sz="900" dirty="0"/>
+            <a:endParaRPr lang="en-US" sz="1300" dirty="0"/>
           </a:p>
         </p:txBody>
       </p:sp>
@@ -6543,8 +6593,8 @@
         </p:nvSpPr>
         <p:spPr>
           <a:xfrm>
-            <a:off x="7293689" y="3534664"/>
-            <a:ext cx="4349366" cy="1441196"/>
+            <a:off x="7293689" y="4247388"/>
+            <a:ext cx="4349366" cy="780796"/>
           </a:xfrm>
           <a:prstGeom prst="rect">
             <a:avLst/>
@@ -6564,59 +6614,31 @@
               <a:buChar char="■"/>
             </a:pPr>
             <a:r>
-              <a:rPr lang="en-US" sz="1400" dirty="0">
-                <a:solidFill>
-                  <a:srgbClr val="18202D"/>
-                </a:solidFill>
-                <a:latin typeface="Calibri" pitchFamily="34" charset="0"/>
-                <a:ea typeface="Calibri" pitchFamily="34" charset="-122"/>
-                <a:cs typeface="Calibri" pitchFamily="34" charset="-120"/>
-              </a:rPr>
-              <a:t>Declared like a requirement, keyword `concern`</a:t>
-            </a:r>
-            <a:endParaRPr lang="en-US" sz="1400" dirty="0"/>
-          </a:p>
-          <a:p>
-            <a:pPr marL="228600" indent="-228600">
-              <a:spcBef>
-                <a:spcPts val="600"/>
-              </a:spcBef>
-              <a:buSzPct val="100000"/>
-              <a:buChar char="■"/>
-            </a:pPr>
-            <a:r>
-              <a:rPr lang="en-US" sz="1400" dirty="0">
-                <a:solidFill>
-                  <a:srgbClr val="18202D"/>
-                </a:solidFill>
-                <a:latin typeface="Calibri" pitchFamily="34" charset="0"/>
-                <a:ea typeface="Calibri" pitchFamily="34" charset="-122"/>
-                <a:cs typeface="Calibri" pitchFamily="34" charset="-120"/>
-              </a:rPr>
-              <a:t>Subject first, before any stakeholder</a:t>
-            </a:r>
-            <a:endParaRPr lang="en-US" sz="1400" dirty="0"/>
-          </a:p>
-          <a:p>
-            <a:pPr marL="228600" indent="-228600">
-              <a:spcBef>
-                <a:spcPts val="600"/>
-              </a:spcBef>
-              <a:buSzPct val="100000"/>
-              <a:buChar char="■"/>
-            </a:pPr>
-            <a:r>
-              <a:rPr lang="en-US" sz="1400" dirty="0">
-                <a:solidFill>
-                  <a:srgbClr val="18202D"/>
-                </a:solidFill>
-                <a:latin typeface="Calibri" pitchFamily="34" charset="0"/>
-                <a:ea typeface="Calibri" pitchFamily="34" charset="-122"/>
-                <a:cs typeface="Calibri" pitchFamily="34" charset="-120"/>
-              </a:rPr>
-              <a:t>Stakeholder parameters are part usages, typed by part definitions</a:t>
-            </a:r>
-            <a:endParaRPr lang="en-US" sz="1400" dirty="0"/>
+              <a:rPr lang="en-US" sz="1900" dirty="0">
+                <a:solidFill>
+                  <a:srgbClr val="18202D"/>
+                </a:solidFill>
+                <a:latin typeface="Calibri" pitchFamily="34" charset="0"/>
+                <a:ea typeface="Calibri" pitchFamily="34" charset="-122"/>
+                <a:cs typeface="Calibri" pitchFamily="34" charset="-120"/>
+              </a:rPr>
+              <a:t>Declared like a requirement, keyword </a:t>
+            </a:r>
+            <a:pPr indent="0" marL="0">
+              <a:buNone/>
+            </a:pPr>
+            <a:r>
+              <a:rPr lang="en-US" sz="1900" dirty="0">
+                <a:solidFill>
+                  <a:srgbClr val="18202D"/>
+                </a:solidFill>
+                <a:latin typeface="Consolas" pitchFamily="34" charset="0"/>
+                <a:ea typeface="Consolas" pitchFamily="34" charset="-122"/>
+                <a:cs typeface="Consolas" pitchFamily="34" charset="-120"/>
+              </a:rPr>
+              <a:t>concern</a:t>
+            </a:r>
+            <a:endParaRPr lang="en-US" sz="1900" dirty="0"/>
           </a:p>
         </p:txBody>
       </p:sp>
@@ -6701,8 +6723,8 @@
         </p:nvSpPr>
         <p:spPr>
           <a:xfrm>
-            <a:off x="548640" y="5828538"/>
-            <a:ext cx="11094415" cy="435102"/>
+            <a:off x="548640" y="5665851"/>
+            <a:ext cx="11094415" cy="597789"/>
           </a:xfrm>
           <a:prstGeom prst="rect">
             <a:avLst/>
@@ -6740,7 +6762,7 @@
                 <a:ea typeface="Calibri" pitchFamily="34" charset="-122"/>
                 <a:cs typeface="Calibri" pitchFamily="34" charset="-120"/>
               </a:rPr>
-              <a:t>From the AeroLink reference model: a need that frames a Week 1 concern (the construct Week 9 teaches). Checked (PASS).</a:t>
+              <a:t>From the AeroLink reference model: the need NEED-004 frames the Week 1 concern CON-006, in the graphical notation (the construct Week 9 teaches). Checked (PASS).</a:t>
             </a:r>
             <a:endParaRPr lang="en-US" sz="1050" dirty="0"/>
           </a:p>
@@ -6818,7 +6840,7 @@
       </p:sp>
       <p:pic>
         <p:nvPicPr>
-          <p:cNvPr id="4" name="Image 0" descr="Listing (file sysml/reference/aerolink_v01_skeleton.sysml, checked: PASS): requirement &lt;'NEED-004'&gt; 'Pads not limited by turnaround' {     doc /* … */     subject enterprise : Context::AeroLinkEnterprise;     stakeholder vertiportOperators : Stakeholders::'STK-005';     frame Stakeholders::'CON-006'; }">    </p:cNvPr>
+          <p:cNvPr id="4" name="Image 0" descr="At the top, a rounded box «requirement» &lt;'NEED-004'&gt; 'Pads not limited by turnaround' with a subject compartment, enterprise : Context::AeroLinkEnterprise, and a stakeholders compartment, vertiportOperators : Stakeholders::'STK-005'. A solid line with an open arrowhead, labeled «frame», runs down to a rounded, shaded box «concern» &lt;'CON-006'&gt; 'Pad throughput and charging capacity'. A note beside the arrow: satisfying the need includes addressing the concern. At the bottom: Week 9: needs frame your concerns. Week 14: viewpoints do.">    </p:cNvPr>
           <p:cNvPicPr>
             <a:picLocks noChangeAspect="1"/>
           </p:cNvPicPr>
@@ -6832,8 +6854,8 @@
         </p:blipFill>
         <p:spPr>
           <a:xfrm>
-            <a:off x="548640" y="2791726"/>
-            <a:ext cx="6379289" cy="1388086"/>
+            <a:off x="561954" y="1280160"/>
+            <a:ext cx="6352661" cy="4248531"/>
           </a:xfrm>
           <a:prstGeom prst="rect">
             <a:avLst/>
@@ -6877,7 +6899,35 @@
                 <a:ea typeface="Calibri" pitchFamily="34" charset="-122"/>
                 <a:cs typeface="Calibri" pitchFamily="34" charset="-120"/>
               </a:rPr>
-              <a:t>A requirement can `frame` a concern</a:t>
+              <a:t>A requirement can </a:t>
+            </a:r>
+            <a:pPr indent="0" marL="0">
+              <a:buNone/>
+            </a:pPr>
+            <a:r>
+              <a:rPr lang="en-US" sz="2000" dirty="0">
+                <a:solidFill>
+                  <a:srgbClr val="18202D"/>
+                </a:solidFill>
+                <a:latin typeface="Consolas" pitchFamily="34" charset="0"/>
+                <a:ea typeface="Consolas" pitchFamily="34" charset="-122"/>
+                <a:cs typeface="Consolas" pitchFamily="34" charset="-120"/>
+              </a:rPr>
+              <a:t>frame</a:t>
+            </a:r>
+            <a:pPr indent="0" marL="0">
+              <a:buNone/>
+            </a:pPr>
+            <a:r>
+              <a:rPr lang="en-US" sz="2000" dirty="0">
+                <a:solidFill>
+                  <a:srgbClr val="18202D"/>
+                </a:solidFill>
+                <a:latin typeface="Calibri" pitchFamily="34" charset="0"/>
+                <a:ea typeface="Calibri" pitchFamily="34" charset="-122"/>
+                <a:cs typeface="Calibri" pitchFamily="34" charset="-120"/>
+              </a:rPr>
+              <a:t> a concern</a:t>
             </a:r>
             <a:endParaRPr lang="en-US" sz="2000" dirty="0"/>
           </a:p>
@@ -7027,8 +7077,8 @@
         </p:nvSpPr>
         <p:spPr>
           <a:xfrm>
-            <a:off x="548640" y="5828538"/>
-            <a:ext cx="11094415" cy="435102"/>
+            <a:off x="548640" y="5665851"/>
+            <a:ext cx="11094415" cy="597789"/>
           </a:xfrm>
           <a:prstGeom prst="rect">
             <a:avLst/>
@@ -7066,7 +7116,7 @@
                 <a:ea typeface="Calibri" pitchFamily="34" charset="-122"/>
                 <a:cs typeface="Calibri" pitchFamily="34" charset="-120"/>
               </a:rPr>
-              <a:t>The AeroLink context in the generated Week 8 model (FICTIONAL): the enterprise, the system of interest and six external systems. Checked (PASS).</a:t>
+              <a:t>The AeroLink context in the generated Week 8 model, in the graphical notation (FICTIONAL): the enterprise ENT-001 as a part definition; the context part, which refers to the system of interest and holds 6 external systems as part usages with their IDs, named as systems. Checked (PASS).</a:t>
             </a:r>
             <a:endParaRPr lang="en-US" sz="1050" dirty="0"/>
           </a:p>
@@ -7144,7 +7194,7 @@
       </p:sp>
       <p:pic>
         <p:nvPicPr>
-          <p:cNvPr id="4" name="Image 0" descr="Listing (file sysml/lectures/week08/aerolink_context_stakeholders_v01.sysml, checked: PASS): part def &lt;'ENT-001'&gt; 'AeroLink Urban Mobility' {     doc /* … */ } part context {     doc /* The operating context: the system of interest and 6 external system(s). */     ref part systemOfInterest :&gt; Physical::soi;     part &lt;'EXT-001'&gt; controlledAirspaceAirTrafficService : 'Controlled airspace (air traffic service)' { doc /* … */ }     part &lt;'EXT-002'&gt; electricGrid : 'Electric grid' { doc /* … */ }     part &lt;'EXT-003'&gt; weather : 'Weather' { doc /* … */ }     part &lt;'EXT-004'&gt; aircraftAndSparesSupply : 'Aircraft and spares supply' { doc /* … */ }     part &lt;'EXT-005'&gt; publicTransportNetwork : 'Public transport network' { doc /* … */ }     part &lt;'EXT-006'&gt; emergencyResponseService : 'Emergency response service' { doc /* … */ } }">    </p:cNvPr>
+          <p:cNvPr id="4" name="Image 0" descr="At the top, a square-cornered box «part def» &lt;'ENT-001'&gt; 'AeroLink Urban Mobility', labeled the enterprise: a part definition in the package Context. Below, a large rounded box «part» context. In its middle, a shaded rounded box «ref part» systemOfInterest :&gt; Physical::soi, labeled ref: refers to the system owned in Physical. Around it, 6 rounded boxes, labeled external systems: part usages, each with its Phase I ID: «part» &lt;'EXT-001'&gt; controlledAirspaceAirTrafficService : 'Controlled airspace (air traffic service)'; «part» &lt;'EXT-002'&gt; electricGrid : 'Electric grid'; «part» &lt;'EXT-003'&gt; weather : 'Weather'; «part» &lt;'EXT-004'&gt; aircraftAndSparesSupply : 'Aircraft and spares supply'; «part» &lt;'EXT-005'&gt; publicTransportNetwork : 'Public transport network'; «part» &lt;'EXT-006'&gt; emergencyResponseService : 'Emergency response service'}.">    </p:cNvPr>
           <p:cNvPicPr>
             <a:picLocks noChangeAspect="1"/>
           </p:cNvPicPr>
@@ -7158,120 +7208,14 @@
         </p:blipFill>
         <p:spPr>
           <a:xfrm>
-            <a:off x="548640" y="2091354"/>
-            <a:ext cx="6379289" cy="2788829"/>
+            <a:off x="1236711" y="1280160"/>
+            <a:ext cx="9718274" cy="4248531"/>
           </a:xfrm>
           <a:prstGeom prst="rect">
             <a:avLst/>
           </a:prstGeom>
         </p:spPr>
       </p:pic>
-      <p:sp>
-        <p:nvSpPr>
-          <p:cNvPr id="5" name="Text 2"/>
-          <p:cNvSpPr/>
-          <p:nvPr/>
-        </p:nvSpPr>
-        <p:spPr>
-          <a:xfrm>
-            <a:off x="7293689" y="1280160"/>
-            <a:ext cx="4349366" cy="2917952"/>
-          </a:xfrm>
-          <a:prstGeom prst="rect">
-            <a:avLst/>
-          </a:prstGeom>
-          <a:noFill/>
-          <a:ln/>
-        </p:spPr>
-        <p:txBody>
-          <a:bodyPr wrap="square" lIns="25400" tIns="25400" rIns="25400" bIns="25400" rtlCol="0" anchor="t"/>
-          <a:lstStyle/>
-          <a:p>
-            <a:pPr marL="228600" indent="-228600">
-              <a:spcBef>
-                <a:spcPts val="600"/>
-              </a:spcBef>
-              <a:buSzPct val="100000"/>
-              <a:buChar char="■"/>
-            </a:pPr>
-            <a:r>
-              <a:rPr lang="en-US" sz="2000" dirty="0">
-                <a:solidFill>
-                  <a:srgbClr val="18202D"/>
-                </a:solidFill>
-                <a:latin typeface="Calibri" pitchFamily="34" charset="0"/>
-                <a:ea typeface="Calibri" pitchFamily="34" charset="-122"/>
-                <a:cs typeface="Calibri" pitchFamily="34" charset="-120"/>
-              </a:rPr>
-              <a:t>ENT-001: a part definition, the enterprise</a:t>
-            </a:r>
-            <a:endParaRPr lang="en-US" sz="2000" dirty="0"/>
-          </a:p>
-          <a:p>
-            <a:pPr marL="228600" indent="-228600">
-              <a:spcBef>
-                <a:spcPts val="600"/>
-              </a:spcBef>
-              <a:buSzPct val="100000"/>
-              <a:buChar char="■"/>
-            </a:pPr>
-            <a:r>
-              <a:rPr lang="en-US" sz="2000" dirty="0">
-                <a:solidFill>
-                  <a:srgbClr val="18202D"/>
-                </a:solidFill>
-                <a:latin typeface="Calibri" pitchFamily="34" charset="0"/>
-                <a:ea typeface="Calibri" pitchFamily="34" charset="-122"/>
-                <a:cs typeface="Calibri" pitchFamily="34" charset="-120"/>
-              </a:rPr>
-              <a:t>The context part refers to the system of interest</a:t>
-            </a:r>
-            <a:endParaRPr lang="en-US" sz="2000" dirty="0"/>
-          </a:p>
-          <a:p>
-            <a:pPr marL="228600" indent="-228600">
-              <a:spcBef>
-                <a:spcPts val="600"/>
-              </a:spcBef>
-              <a:buSzPct val="100000"/>
-              <a:buChar char="■"/>
-            </a:pPr>
-            <a:r>
-              <a:rPr lang="en-US" sz="2000" dirty="0">
-                <a:solidFill>
-                  <a:srgbClr val="18202D"/>
-                </a:solidFill>
-                <a:latin typeface="Calibri" pitchFamily="34" charset="0"/>
-                <a:ea typeface="Calibri" pitchFamily="34" charset="-122"/>
-                <a:cs typeface="Calibri" pitchFamily="34" charset="-120"/>
-              </a:rPr>
-              <a:t>6 external systems: part usages with their IDs</a:t>
-            </a:r>
-            <a:endParaRPr lang="en-US" sz="2000" dirty="0"/>
-          </a:p>
-          <a:p>
-            <a:pPr marL="228600" indent="-228600">
-              <a:spcBef>
-                <a:spcPts val="600"/>
-              </a:spcBef>
-              <a:buSzPct val="100000"/>
-              <a:buChar char="■"/>
-            </a:pPr>
-            <a:r>
-              <a:rPr lang="en-US" sz="2000" dirty="0">
-                <a:solidFill>
-                  <a:srgbClr val="18202D"/>
-                </a:solidFill>
-                <a:latin typeface="Calibri" pitchFamily="34" charset="0"/>
-                <a:ea typeface="Calibri" pitchFamily="34" charset="-122"/>
-                <a:cs typeface="Calibri" pitchFamily="34" charset="-120"/>
-              </a:rPr>
-              <a:t>Names as systems, not as the organizations behind them</a:t>
-            </a:r>
-            <a:endParaRPr lang="en-US" sz="2000" dirty="0"/>
-          </a:p>
-        </p:txBody>
-      </p:sp>
       <p:sp>
         <p:nvSpPr>
           <p:cNvPr id="25" name="Slide Number Placeholder 0"/>
@@ -7353,8 +7297,8 @@
         </p:nvSpPr>
         <p:spPr>
           <a:xfrm>
-            <a:off x="548640" y="5828538"/>
-            <a:ext cx="11094415" cy="435102"/>
+            <a:off x="548640" y="5665851"/>
+            <a:ext cx="11094415" cy="597789"/>
           </a:xfrm>
           <a:prstGeom prst="rect">
             <a:avLst/>
@@ -7392,7 +7336,7 @@
                 <a:ea typeface="Calibri" pitchFamily="34" charset="-122"/>
                 <a:cs typeface="Calibri" pitchFamily="34" charset="-120"/>
               </a:rPr>
-              <a:t>One stakeholder, one of its concerns and the conflict it is part of, from the generated AeroLink model (FICTIONAL). Checked (PASS).</a:t>
+              <a:t>One stakeholder with its ratings, the conflict it is part of and one of its concerns, from the generated AeroLink model, in the graphical notation (FICTIONAL). Checked (PASS).</a:t>
             </a:r>
             <a:endParaRPr lang="en-US" sz="1050" dirty="0"/>
           </a:p>
@@ -7462,7 +7406,7 @@
                 <a:ea typeface="Calibri" pitchFamily="34" charset="-122"/>
                 <a:cs typeface="Calibri" pitchFamily="34" charset="-120"/>
               </a:rPr>
-              <a:t>AeroLink worked example II: stakeholders, concerns, ratings, relationships</a:t>
+              <a:t>AeroLink worked example II: stakeholders and concerns</a:t>
             </a:r>
             <a:endParaRPr lang="en-US" sz="3000" dirty="0"/>
           </a:p>
@@ -7470,7 +7414,7 @@
       </p:sp>
       <p:pic>
         <p:nvPicPr>
-          <p:cNvPr id="4" name="Image 0" descr="Listing (file sysml/lectures/week08/aerolink_context_stakeholders_v01.sysml, checked: PASS): part def &lt;'STK-005'&gt; 'Vertiport operators' {     doc /* … */     @StakeholderAssessment { interest = 5; influence = 4; influenceReason = &quot;Own a scarce capacity constraint (pads, chargers)&quot;; support = 3; supportReason = &quot;Gain traffic from the service; want throughput protected&quot;; } } concern &lt;'CON-006'&gt; 'Pad throughput and charging capacity' {     doc /* … */     subject enterprise : Context::'ENT-001';     stakeholder vertiportOperators : 'STK-005'; } #conflictsWith dependency &lt;'REL-002'&gt; from 'STK-004' to 'STK-005' {     doc /* STK-004 conflicts with STK-005. Noise and siting vs throughput. */ }">    </p:cNvPr>
+          <p:cNvPr id="4" name="Image 0" descr="Top left, a square-cornered box «part def» &lt;'STK-004'&gt; 'Communities'. Top right, a square-cornered box «part def» &lt;'STK-005'&gt; 'Vertiport operators' with a compartment @StakeholderAssessment: interest = 5, influence = 4, support = 3. A dashed line with an open arrowhead runs from STK-004 to STK-005, labeled «conflictsWith» &lt;'REL-002'&gt;. A dashed accent arrow labeled ratings and reasons: metadata (course convention) points at the assessment compartment. Below, a wide rounded, shaded box «concern» &lt;'CON-006'&gt; 'Pad throughput and charging capacity' with a subject compartment, enterprise : Context::'ENT-001', and a stakeholders compartment, vertiportOperators : 'STK-005'.">    </p:cNvPr>
           <p:cNvPicPr>
             <a:picLocks noChangeAspect="1"/>
           </p:cNvPicPr>
@@ -7484,8 +7428,8 @@
         </p:blipFill>
         <p:spPr>
           <a:xfrm>
-            <a:off x="548640" y="2220037"/>
-            <a:ext cx="6379289" cy="2531464"/>
+            <a:off x="548640" y="1344701"/>
+            <a:ext cx="6379289" cy="4119449"/>
           </a:xfrm>
           <a:prstGeom prst="rect">
             <a:avLst/>
@@ -7586,11 +7530,11 @@
         <p:spPr>
           <a:xfrm>
             <a:off x="7293689" y="3660648"/>
-            <a:ext cx="4349366" cy="1847342"/>
+            <a:ext cx="4349366" cy="1583944"/>
           </a:xfrm>
           <a:prstGeom prst="roundRect">
             <a:avLst>
-              <a:gd name="adj" fmla="val 2970"/>
+              <a:gd name="adj" fmla="val 3464"/>
             </a:avLst>
           </a:prstGeom>
           <a:solidFill>
@@ -7613,7 +7557,7 @@
         <p:spPr>
           <a:xfrm>
             <a:off x="7430849" y="3660648"/>
-            <a:ext cx="4075046" cy="1847342"/>
+            <a:ext cx="4075046" cy="1583944"/>
           </a:xfrm>
           <a:prstGeom prst="rect">
             <a:avLst/>
@@ -7650,11 +7594,109 @@
                 <a:solidFill>
                   <a:srgbClr val="18202D"/>
                 </a:solidFill>
-                <a:latin typeface="Calibri" pitchFamily="34" charset="0"/>
-                <a:ea typeface="Calibri" pitchFamily="34" charset="-122"/>
-                <a:cs typeface="Calibri" pitchFamily="34" charset="-120"/>
-              </a:rPr>
-              <a:t>`from A to B`: A, the client, depends on B, the supplier; a change to B may change A (SysML v2.1 Beta 2, Part 1, 7.3). FAA regulates OEM: `#regulatedBy … from STK-011 to STK-002`.</a:t>
+                <a:latin typeface="Consolas" pitchFamily="34" charset="0"/>
+                <a:ea typeface="Consolas" pitchFamily="34" charset="-122"/>
+                <a:cs typeface="Consolas" pitchFamily="34" charset="-120"/>
+              </a:rPr>
+              <a:t>from A to B</a:t>
+            </a:r>
+            <a:pPr indent="0" marL="0">
+              <a:buNone/>
+            </a:pPr>
+            <a:r>
+              <a:rPr lang="en-US" sz="1700" dirty="0">
+                <a:solidFill>
+                  <a:srgbClr val="18202D"/>
+                </a:solidFill>
+                <a:latin typeface="Calibri" pitchFamily="34" charset="0"/>
+                <a:ea typeface="Calibri" pitchFamily="34" charset="-122"/>
+                <a:cs typeface="Calibri" pitchFamily="34" charset="-120"/>
+              </a:rPr>
+              <a:t>: A, the client, depends on B, the supplier. FAA regulates OEM: </a:t>
+            </a:r>
+            <a:pPr indent="0" marL="0">
+              <a:buNone/>
+            </a:pPr>
+            <a:r>
+              <a:rPr lang="en-US" sz="1700" dirty="0">
+                <a:solidFill>
+                  <a:srgbClr val="18202D"/>
+                </a:solidFill>
+                <a:latin typeface="Consolas" pitchFamily="34" charset="0"/>
+                <a:ea typeface="Consolas" pitchFamily="34" charset="-122"/>
+                <a:cs typeface="Consolas" pitchFamily="34" charset="-120"/>
+              </a:rPr>
+              <a:t>#regulatedBy</a:t>
+            </a:r>
+            <a:pPr indent="0" marL="0">
+              <a:buNone/>
+            </a:pPr>
+            <a:r>
+              <a:rPr lang="en-US" sz="1700" dirty="0">
+                <a:solidFill>
+                  <a:srgbClr val="18202D"/>
+                </a:solidFill>
+                <a:latin typeface="Calibri" pitchFamily="34" charset="0"/>
+                <a:ea typeface="Calibri" pitchFamily="34" charset="-122"/>
+                <a:cs typeface="Calibri" pitchFamily="34" charset="-120"/>
+              </a:rPr>
+              <a:t> from </a:t>
+            </a:r>
+            <a:pPr indent="0" marL="0">
+              <a:buNone/>
+            </a:pPr>
+            <a:r>
+              <a:rPr lang="en-US" sz="1700" dirty="0">
+                <a:solidFill>
+                  <a:srgbClr val="18202D"/>
+                </a:solidFill>
+                <a:latin typeface="Consolas" pitchFamily="34" charset="0"/>
+                <a:ea typeface="Consolas" pitchFamily="34" charset="-122"/>
+                <a:cs typeface="Consolas" pitchFamily="34" charset="-120"/>
+              </a:rPr>
+              <a:t>STK-011</a:t>
+            </a:r>
+            <a:pPr indent="0" marL="0">
+              <a:buNone/>
+            </a:pPr>
+            <a:r>
+              <a:rPr lang="en-US" sz="1700" dirty="0">
+                <a:solidFill>
+                  <a:srgbClr val="18202D"/>
+                </a:solidFill>
+                <a:latin typeface="Calibri" pitchFamily="34" charset="0"/>
+                <a:ea typeface="Calibri" pitchFamily="34" charset="-122"/>
+                <a:cs typeface="Calibri" pitchFamily="34" charset="-120"/>
+              </a:rPr>
+              <a:t> to </a:t>
+            </a:r>
+            <a:pPr indent="0" marL="0">
+              <a:buNone/>
+            </a:pPr>
+            <a:r>
+              <a:rPr lang="en-US" sz="1700" dirty="0">
+                <a:solidFill>
+                  <a:srgbClr val="18202D"/>
+                </a:solidFill>
+                <a:latin typeface="Consolas" pitchFamily="34" charset="0"/>
+                <a:ea typeface="Consolas" pitchFamily="34" charset="-122"/>
+                <a:cs typeface="Consolas" pitchFamily="34" charset="-120"/>
+              </a:rPr>
+              <a:t>STK-002</a:t>
+            </a:r>
+            <a:pPr indent="0" marL="0">
+              <a:buNone/>
+            </a:pPr>
+            <a:r>
+              <a:rPr lang="en-US" sz="1700" dirty="0">
+                <a:solidFill>
+                  <a:srgbClr val="18202D"/>
+                </a:solidFill>
+                <a:latin typeface="Calibri" pitchFamily="34" charset="0"/>
+                <a:ea typeface="Calibri" pitchFamily="34" charset="-122"/>
+                <a:cs typeface="Calibri" pitchFamily="34" charset="-120"/>
+              </a:rPr>
+              <a:t>.</a:t>
             </a:r>
             <a:endParaRPr lang="en-US" sz="1200" dirty="0"/>
           </a:p>
@@ -7827,7 +7869,7 @@
       </p:sp>
       <p:pic>
         <p:nvPicPr>
-          <p:cNvPr id="4" name="Image 0" descr="A four-row checklist table with columns Question, Result, Disposition and a status mark. Row 'Completeness': 15 of 15 stakeholders, 17 of 17 concerns and 6 of 6 external systems are in the model, each once, with the register's ID and name. Disposition: None needed. Mark: check. Row 'Structure': Every concern has the enterprise as its subject and one stakeholder typed by a stakeholder part definition; 15 of 15 stakeholders hold at least one concern. 8 relationships are modeled, 1 of them a conflict. Disposition: None needed. Mark: check. Row 'Fidelity': Each concern’s documentation is the register text. The instructor reference SysML files carried the earlier CON-015 wording (delivery and certification progress) and named four external systems after the organizations behind them. Disposition: Logged and corrected in the reference files in Week 8, after review (the case wording is canonical). Mark: check. Row 'Gaps': STK-015 and CON-017 are in this model but not yet in the shared reference baseline that the later-week tools read; CON-015 has no need, by a recorded decision (the purchase-agreement gap of Week 1). Disposition: STK-015 and CON-017 join the reference when the Week 12 and 13 tools are rebuilt; the CON-015 decision is carried as is. Mark: gap. A side label spans rows 1 and 2: 'the tool answers'; a side label spans rows 3 and 4: 'the team answers'.">    </p:cNvPr>
+          <p:cNvPr id="4" name="Image 0" descr="A four-row checklist with columns Question, Result and disposition, and Status. Each row shows the opening of its result, cut with an ellipsis where it is long, then the disposition; the full text of each row follows. Row 'Completeness': 15 of 15 stakeholders, 17 of 17 concerns and 6 of 6 external systems are in the model, each once, with the register's ID and name. Disposition: None needed. Mark: check. Row 'Structure': Every concern has the enterprise as its subject and one stakeholder typed by a stakeholder part definition; 15 of 15 stakeholders hold at least one concern. 8 relationships are modeled, 1 of them a conflict. Disposition: None needed. Mark: check. Row 'Fidelity': Each concern’s documentation is the register text. Review found two differences from the Week 1 case in an earlier draft: the earlier CON-015 wording (delivery and certification progress) and four external systems named after the organizations behind them. Disposition: Logged, then corrected to the Week 1 wording (the case wording is canonical). Mark: check. Row 'Gaps': CON-015 has no need, by a decision recorded in Week 1 (the purchase-agreement gap). Disposition: Carried as is, with the reason recorded. Mark: gap. A side label spans rows 1 and 2: 'the tool answers'; a side label spans rows 3 and 4: 'the team answers'.">    </p:cNvPr>
           <p:cNvPicPr>
             <a:picLocks noChangeAspect="1"/>
           </p:cNvPicPr>
@@ -7841,8 +7883,8 @@
         </p:blipFill>
         <p:spPr>
           <a:xfrm>
-            <a:off x="548640" y="1992318"/>
-            <a:ext cx="6379289" cy="3149589"/>
+            <a:off x="885013" y="1280160"/>
+            <a:ext cx="5706543" cy="4573905"/>
           </a:xfrm>
           <a:prstGeom prst="rect">
             <a:avLst/>
@@ -8167,8 +8209,8 @@
         </p:blipFill>
         <p:spPr>
           <a:xfrm>
-            <a:off x="1405439" y="1280160"/>
-            <a:ext cx="9380818" cy="4411218"/>
+            <a:off x="1392208" y="1280160"/>
+            <a:ext cx="9407280" cy="4411218"/>
           </a:xfrm>
           <a:prstGeom prst="rect">
             <a:avLst/>
@@ -8256,8 +8298,8 @@
         </p:nvSpPr>
         <p:spPr>
           <a:xfrm>
-            <a:off x="548640" y="5991225"/>
-            <a:ext cx="11094415" cy="272415"/>
+            <a:off x="548640" y="5828538"/>
+            <a:ext cx="11094415" cy="435102"/>
           </a:xfrm>
           <a:prstGeom prst="rect">
             <a:avLst/>
@@ -8295,7 +8337,7 @@
                 <a:ea typeface="Calibri" pitchFamily="34" charset="-122"/>
                 <a:cs typeface="Calibri" pitchFamily="34" charset="-120"/>
               </a:rPr>
-              <a:t>Lab L8 deliverables: three files, one upload (course convention).</a:t>
+              <a:t>The Week 8 journey: each student works through Learn, Guided Practice and the Assessment; the team runs the Phase I export tool, which writes model v0.1 and the mapping matrix.</a:t>
             </a:r>
             <a:endParaRPr lang="en-US" sz="1050" dirty="0"/>
           </a:p>
@@ -8334,7 +8376,7 @@
                 <a:ea typeface="Calibri" pitchFamily="34" charset="-122"/>
                 <a:cs typeface="Calibri" pitchFamily="34" charset="-120"/>
               </a:rPr>
-              <a:t>Lab L8: model v0.1 of your enterprise</a:t>
+              <a:t>This week: Learn, Practice, Assessment, export</a:t>
             </a:r>
             <a:endParaRPr lang="en-US" sz="3000" dirty="0"/>
           </a:p>
@@ -8373,7 +8415,7 @@
                 <a:ea typeface="Calibri" pitchFamily="34" charset="-122"/>
                 <a:cs typeface="Calibri" pitchFamily="34" charset="-120"/>
               </a:rPr>
-              <a:t>Due before Week 9 Session 1, on the LMS; your own enterprise, never AeroLink</a:t>
+              <a:t>Due before Week 9 Session 1; your own enterprise, never AeroLink</a:t>
             </a:r>
             <a:endParaRPr lang="en-US" sz="1600" dirty="0"/>
           </a:p>
@@ -8381,7 +8423,7 @@
       </p:sp>
       <p:pic>
         <p:nvPicPr>
-          <p:cNvPr id="5" name="Image 0" descr="Three file cards side by side. Card 1: 'team-NN-model-v01.sysml' — model v0.1: the package skeleton with the purpose statement, the Context and Stakeholders packages fully modeled, every later package present with a note of the week that fills it. Card 2: 'team-NN-mapping-matrix.md' — the artifact-to-model mapping matrix for the whole Systems Thinking package, with a reason for every non-obvious choice, and the import audit with a disposition for every gap. Card 3: 'team-NN-checker-log.txt' — the checker output: the tool proof (the pass file and the fail file) and the final run of model v0.1 with zero errors, every warning explained. Under the cards a strip: 'One upload by one member, before Week 9, Session 1. AI usage statement included in the mapping matrix file.'">    </p:cNvPr>
+          <p:cNvPr id="5" name="Image 0" descr="Top row, headed each student: three boxes joined by arrows. Learn: section by section. Guided Practice: graphical and textual tasks. Assessment: 12 items; a wrong answer shows a hint: try again. Second row, headed your team: a shaded box, Phase I export tool: your Phase I exports in, with an arrow to two file cards, team-NN-model-v01.sysml and team-NN-mapping-matrix.md, and an arrow on to model v0.1: Week 9 continues from it.">    </p:cNvPr>
           <p:cNvPicPr>
             <a:picLocks noChangeAspect="1"/>
           </p:cNvPicPr>
@@ -8395,8 +8437,8 @@
         </p:blipFill>
         <p:spPr>
           <a:xfrm>
-            <a:off x="548640" y="2204380"/>
-            <a:ext cx="6379289" cy="2999785"/>
+            <a:off x="548640" y="1754740"/>
+            <a:ext cx="6379289" cy="3736377"/>
           </a:xfrm>
           <a:prstGeom prst="rect">
             <a:avLst/>
@@ -8440,7 +8482,7 @@
                 <a:ea typeface="Calibri" pitchFamily="34" charset="-122"/>
                 <a:cs typeface="Calibri" pitchFamily="34" charset="-120"/>
               </a:rPr>
-              <a:t>Your own enterprise, never AeroLink</a:t>
+              <a:t>Each of you: Learn, then Guided Practice</a:t>
             </a:r>
             <a:endParaRPr lang="en-US" sz="2000" dirty="0"/>
           </a:p>
@@ -8453,6 +8495,20 @@
               <a:buChar char="■"/>
             </a:pPr>
             <a:r>
+              <a:rPr lang="en-US" sz="2000" b="1" dirty="0">
+                <a:solidFill>
+                  <a:srgbClr val="18202D"/>
+                </a:solidFill>
+                <a:latin typeface="Calibri" pitchFamily="34" charset="0"/>
+                <a:ea typeface="Calibri" pitchFamily="34" charset="-122"/>
+                <a:cs typeface="Calibri" pitchFamily="34" charset="-120"/>
+              </a:rPr>
+              <a:t>Assessment:</a:t>
+            </a:r>
+            <a:pPr indent="0" marL="0">
+              <a:buNone/>
+            </a:pPr>
+            <a:r>
               <a:rPr lang="en-US" sz="2000" dirty="0">
                 <a:solidFill>
                   <a:srgbClr val="18202D"/>
@@ -8461,7 +8517,7 @@
                 <a:ea typeface="Calibri" pitchFamily="34" charset="-122"/>
                 <a:cs typeface="Calibri" pitchFamily="34" charset="-120"/>
               </a:rPr>
-              <a:t>Three files: team-NN-model-v01.sysml, team-NN-mapping-matrix.md, team-NN-checker-log.txt</a:t>
+              <a:t> 12 items, individual, formative</a:t>
             </a:r>
             <a:endParaRPr lang="en-US" sz="2000" dirty="0"/>
           </a:p>
@@ -8482,7 +8538,35 @@
                 <a:ea typeface="Calibri" pitchFamily="34" charset="-122"/>
                 <a:cs typeface="Calibri" pitchFamily="34" charset="-120"/>
               </a:rPr>
-              <a:t>Zero checker errors in the final run; every warning explained</a:t>
+              <a:t>Your team: the </a:t>
+            </a:r>
+            <a:pPr indent="0" marL="0">
+              <a:buNone/>
+            </a:pPr>
+            <a:r>
+              <a:rPr lang="en-US" sz="2000" b="1" dirty="0">
+                <a:solidFill>
+                  <a:srgbClr val="18202D"/>
+                </a:solidFill>
+                <a:latin typeface="Calibri" pitchFamily="34" charset="0"/>
+                <a:ea typeface="Calibri" pitchFamily="34" charset="-122"/>
+                <a:cs typeface="Calibri" pitchFamily="34" charset="-120"/>
+              </a:rPr>
+              <a:t>Phase I export tool</a:t>
+            </a:r>
+            <a:pPr indent="0" marL="0">
+              <a:buNone/>
+            </a:pPr>
+            <a:r>
+              <a:rPr lang="en-US" sz="2000" dirty="0">
+                <a:solidFill>
+                  <a:srgbClr val="18202D"/>
+                </a:solidFill>
+                <a:latin typeface="Calibri" pitchFamily="34" charset="0"/>
+                <a:ea typeface="Calibri" pitchFamily="34" charset="-122"/>
+                <a:cs typeface="Calibri" pitchFamily="34" charset="-120"/>
+              </a:rPr>
+              <a:t> writes model v0.1 and the mapping matrix</a:t>
             </a:r>
             <a:endParaRPr lang="en-US" sz="2000" dirty="0"/>
           </a:p>
@@ -8503,7 +8587,7 @@
                 <a:ea typeface="Calibri" pitchFamily="34" charset="-122"/>
                 <a:cs typeface="Calibri" pitchFamily="34" charset="-120"/>
               </a:rPr>
-              <a:t>Formative feedback before Week 9 Session 2</a:t>
+              <a:t>Validity: the course checker, one installation per team</a:t>
             </a:r>
             <a:endParaRPr lang="en-US" sz="2000" dirty="0"/>
           </a:p>
@@ -8629,7 +8713,7 @@
                 <a:ea typeface="Calibri" pitchFamily="34" charset="-122"/>
                 <a:cs typeface="Calibri" pitchFamily="34" charset="-120"/>
               </a:rPr>
-              <a:t>The lab tool in four steps: import, map, review the findings, preview and export.</a:t>
+              <a:t>The Phase I export tool in four steps: import, map, review the findings, preview and export.</a:t>
             </a:r>
             <a:endParaRPr lang="en-US" sz="1050" dirty="0"/>
           </a:p>
@@ -8707,7 +8791,7 @@
                 <a:ea typeface="Calibri" pitchFamily="34" charset="-122"/>
                 <a:cs typeface="Calibri" pitchFamily="34" charset="-120"/>
               </a:rPr>
-              <a:t>12 minutes, in teams, in the Week 8 lab tool</a:t>
+              <a:t>12 minutes, in teams, in the Phase I export tool</a:t>
             </a:r>
             <a:endParaRPr lang="en-US" sz="1600" dirty="0"/>
           </a:p>
@@ -8715,7 +8799,7 @@
       </p:sp>
       <p:pic>
         <p:nvPicPr>
-          <p:cNvPr id="5" name="Image 0" descr="Four numbered panels left to right, like screens. Panel 1 'Import': a file drop area labeled 'Week 1 model inputs (.json), versions 1 to 3; optional Week 2 model inputs', and a message line 'AeroLink records are refused: import your own'. Panel 2 'Map': a table with columns Kind, Package, Construct, Week, Count; rows for ENT, STK, CON marked 'modeled now', NEED marked 'Week 9', TECH marked 'enter count'. Panel 3 'Findings': four colored tags with labels: Defect (not imported), Gap (needs a disposition), Unmapped kind, Mapped for a later week; beside each gap a text box 'disposition'. Panel 4 'Preview and export': a code preview with the first lines of a package and the purpose doc, and two buttons 'Export .sysml' and 'Export mapping matrix (.md)'.">    </p:cNvPr>
+          <p:cNvPr id="5" name="Image 0" descr="Four numbered panels in a two-by-two grid, like screens. Panel 1 'Import': a file drop area labeled 'Week 1 model inputs (.json), versions 1 to 3; optional Week 2 model inputs', and a message line 'AeroLink records are refused: import your own'. Panel 2 'Map': a table with columns Kind, Package, Construct, Week, Count; rows for ENT, STK, CON marked 'modeled now', NEED marked 'Week 9', TECH marked 'enter count'. Panel 3 'Findings': four colored tags with labels: Defect (not imported), Gap (needs a disposition), Unmapped kind, Mapped for a later week; under the gap tag a text box 'disposition'. Panel 4 'Preview and export': a code preview with the first lines of a package and the purpose doc, and two buttons 'Export .sysml' and 'Export mapping matrix (.md)'.">    </p:cNvPr>
           <p:cNvPicPr>
             <a:picLocks noChangeAspect="1"/>
           </p:cNvPicPr>
@@ -8729,8 +8813,8 @@
         </p:blipFill>
         <p:spPr>
           <a:xfrm>
-            <a:off x="548640" y="2107341"/>
-            <a:ext cx="6379289" cy="3193863"/>
+            <a:off x="735197" y="1554480"/>
+            <a:ext cx="6006174" cy="4299585"/>
           </a:xfrm>
           <a:prstGeom prst="rect">
             <a:avLst/>
@@ -9420,8 +9504,8 @@
         </p:blipFill>
         <p:spPr>
           <a:xfrm>
-            <a:off x="548640" y="1888837"/>
-            <a:ext cx="6379289" cy="3193863"/>
+            <a:off x="657226" y="1280160"/>
+            <a:ext cx="6162116" cy="4411218"/>
           </a:xfrm>
           <a:prstGeom prst="rect">
             <a:avLst/>
@@ -9507,7 +9591,21 @@
                 <a:ea typeface="Calibri" pitchFamily="34" charset="-122"/>
                 <a:cs typeface="Calibri" pitchFamily="34" charset="-120"/>
               </a:rPr>
-              <a:t>Qualified name: names joined by `::`</a:t>
+              <a:t>Qualified name: names joined by </a:t>
+            </a:r>
+            <a:pPr indent="0" marL="0">
+              <a:buNone/>
+            </a:pPr>
+            <a:r>
+              <a:rPr lang="en-US" sz="2000" dirty="0">
+                <a:solidFill>
+                  <a:srgbClr val="18202D"/>
+                </a:solidFill>
+                <a:latin typeface="Consolas" pitchFamily="34" charset="0"/>
+                <a:ea typeface="Consolas" pitchFamily="34" charset="-122"/>
+                <a:cs typeface="Consolas" pitchFamily="34" charset="-120"/>
+              </a:rPr>
+              <a:t>::</a:t>
             </a:r>
             <a:endParaRPr lang="en-US" sz="2000" dirty="0"/>
           </a:p>
@@ -9675,7 +9773,7 @@
                 <a:ea typeface="Calibri" pitchFamily="34" charset="-122"/>
                 <a:cs typeface="Calibri" pitchFamily="34" charset="-120"/>
               </a:rPr>
-              <a:t>A suggested seven-day plan for Lab L8, with the lead role for each task (course convention).</a:t>
+              <a:t>From today to Week 9: what is done, what comes next, and what is due before Week 9 Session 1.</a:t>
             </a:r>
             <a:endParaRPr lang="en-US" sz="1050" dirty="0"/>
           </a:p>
@@ -9714,7 +9812,7 @@
                 <a:ea typeface="Calibri" pitchFamily="34" charset="-122"/>
                 <a:cs typeface="Calibri" pitchFamily="34" charset="-120"/>
               </a:rPr>
-              <a:t>Close: the next seven days</a:t>
+              <a:t>Close: from today to Week 9</a:t>
             </a:r>
             <a:endParaRPr lang="en-US" sz="3000" dirty="0"/>
           </a:p>
@@ -9753,7 +9851,7 @@
                 <a:ea typeface="Calibri" pitchFamily="34" charset="-122"/>
                 <a:cs typeface="Calibri" pitchFamily="34" charset="-120"/>
               </a:rPr>
-              <a:t>Quiz Q8 and the applied exercise open today. Log your hours.</a:t>
+              <a:t>Assessment (formative) and the Phase I export, both before Week 9 Session 1. Log your hours.</a:t>
             </a:r>
             <a:endParaRPr lang="en-US" sz="1600" dirty="0"/>
           </a:p>
@@ -9761,7 +9859,7 @@
       </p:sp>
       <p:pic>
         <p:nvPicPr>
-          <p:cNvPr id="5" name="Image 0" descr="A timeline of days 1 to 7 with bars. Days 1–2: mapping matrix and skeleton with purpose, Architecture; each member writes the doc of at least one package. Day 3: Context package, Architecture. Days 3–4: Stakeholders package (stakeholders, concerns, ratings), Requirements &amp; Compliance; relationships, Architecture. Day 5: import audit with dispositions, Verification &amp; Validation. Day 6: checker runs to zero errors, AI &amp; Data runs, owners fix; AI usage statement. Day 7: integration review and upload, Verification &amp; Validation.">    </p:cNvPr>
+          <p:cNvPr id="5" name="Image 0" descr="Four columns joined by arrows. Session 1, done: MBSE and the core of SysML v2. After Session 1: Learn, section by section, then the Guided Practice tasks. Session 2, today: packages, toolchain, import, stakeholders and concerns. Before Week 9, Session 1, shaded: Assessment (individual, formative) and the Phase I export (team). A strip below: Phase I export tool: your exports in; team-NN-model-v01.sysml (model v0.1) and team-NN-mapping-matrix.md out. The checker: one installation per team, from Install and run the course checker. Log your hours. Week 9 models your needs and requirements in the packages model v0.1 created.">    </p:cNvPr>
           <p:cNvPicPr>
             <a:picLocks noChangeAspect="1"/>
           </p:cNvPicPr>
@@ -9775,8 +9873,8 @@
         </p:blipFill>
         <p:spPr>
           <a:xfrm>
-            <a:off x="2235413" y="1554480"/>
-            <a:ext cx="7720870" cy="4299585"/>
+            <a:off x="548640" y="1642414"/>
+            <a:ext cx="11094415" cy="4123718"/>
           </a:xfrm>
           <a:prstGeom prst="rect">
             <a:avLst/>
@@ -10387,7 +10485,7 @@
                 <a:ea typeface="Calibri" pitchFamily="34" charset="-122"/>
                 <a:cs typeface="Calibri" pitchFamily="34" charset="-120"/>
               </a:rPr>
-              <a:t>The AeroLink reference model opens with private imports of the quantity, unit and scalar-value libraries. Checked (PASS).</a:t>
+              <a:t>The AeroLink reference model’s root package imports the quantity, unit and scalar-value libraries privately, drawn in the graphical notation. Checked (PASS).</a:t>
             </a:r>
             <a:endParaRPr lang="en-US" sz="1050" dirty="0"/>
           </a:p>
@@ -10465,7 +10563,7 @@
       </p:sp>
       <p:pic>
         <p:nvPicPr>
-          <p:cNvPr id="4" name="Image 0" descr="Listing (file sysml/reference/aerolink_v01_skeleton.sysml, checked: PASS): package 'AeroLink Reference Model' {     doc /* … */     private import ISQ::*;     private import SI::*;     private import ScalarValues::*;">    </p:cNvPr>
+          <p:cNvPr id="4" name="Image 0" descr="Left, a package folder named 'AeroLink Reference Model', the root package. Three dashed arrows with open arrowheads run from it to three library package folders on the right, ISQ, SI and ScalarValues, each arrow labeled «private import»*. A note: every member of each library becomes usable by its short name; nothing is re-exported. Below, a key to the import label: «private import», one element, by its name; «private import»*, the members of a package; «private import»**, the members, recursively.">    </p:cNvPr>
           <p:cNvPicPr>
             <a:picLocks noChangeAspect="1"/>
           </p:cNvPicPr>
@@ -10479,8 +10577,8 @@
         </p:blipFill>
         <p:spPr>
           <a:xfrm>
-            <a:off x="548640" y="2724220"/>
-            <a:ext cx="6379289" cy="1523097"/>
+            <a:off x="602347" y="1280160"/>
+            <a:ext cx="6271874" cy="4411218"/>
           </a:xfrm>
           <a:prstGeom prst="rect">
             <a:avLst/>
@@ -10520,25 +10618,11 @@
                 <a:solidFill>
                   <a:srgbClr val="18202D"/>
                 </a:solidFill>
-                <a:latin typeface="Calibri" pitchFamily="34" charset="0"/>
-                <a:ea typeface="Calibri" pitchFamily="34" charset="-122"/>
-                <a:cs typeface="Calibri" pitchFamily="34" charset="-120"/>
-              </a:rPr>
-              <a:t>`::</a:t>
-            </a:r>
-            <a:pPr indent="0" marL="0">
-              <a:buNone/>
-            </a:pPr>
-            <a:r>
-              <a:rPr lang="en-US" sz="2000" i="1" dirty="0">
-                <a:solidFill>
-                  <a:srgbClr val="18202D"/>
-                </a:solidFill>
-                <a:latin typeface="Calibri" pitchFamily="34" charset="0"/>
-                <a:ea typeface="Calibri" pitchFamily="34" charset="-122"/>
-                <a:cs typeface="Calibri" pitchFamily="34" charset="-120"/>
-              </a:rPr>
-              <a:t>` imports all members; `::</a:t>
+                <a:latin typeface="Consolas" pitchFamily="34" charset="0"/>
+                <a:ea typeface="Consolas" pitchFamily="34" charset="-122"/>
+                <a:cs typeface="Consolas" pitchFamily="34" charset="-120"/>
+              </a:rPr>
+              <a:t>::*</a:t>
             </a:r>
             <a:pPr indent="0" marL="0">
               <a:buNone/>
@@ -10552,7 +10636,35 @@
                 <a:ea typeface="Calibri" pitchFamily="34" charset="-122"/>
                 <a:cs typeface="Calibri" pitchFamily="34" charset="-120"/>
               </a:rPr>
-              <a:t>*` imports recursively</a:t>
+              <a:t> imports all members; </a:t>
+            </a:r>
+            <a:pPr indent="0" marL="0">
+              <a:buNone/>
+            </a:pPr>
+            <a:r>
+              <a:rPr lang="en-US" sz="2000" dirty="0">
+                <a:solidFill>
+                  <a:srgbClr val="18202D"/>
+                </a:solidFill>
+                <a:latin typeface="Consolas" pitchFamily="34" charset="0"/>
+                <a:ea typeface="Consolas" pitchFamily="34" charset="-122"/>
+                <a:cs typeface="Consolas" pitchFamily="34" charset="-120"/>
+              </a:rPr>
+              <a:t>::**</a:t>
+            </a:r>
+            <a:pPr indent="0" marL="0">
+              <a:buNone/>
+            </a:pPr>
+            <a:r>
+              <a:rPr lang="en-US" sz="2000" dirty="0">
+                <a:solidFill>
+                  <a:srgbClr val="18202D"/>
+                </a:solidFill>
+                <a:latin typeface="Calibri" pitchFamily="34" charset="0"/>
+                <a:ea typeface="Calibri" pitchFamily="34" charset="-122"/>
+                <a:cs typeface="Calibri" pitchFamily="34" charset="-120"/>
+              </a:rPr>
+              <a:t> imports recursively</a:t>
             </a:r>
             <a:endParaRPr lang="en-US" sz="2000" dirty="0"/>
           </a:p>
@@ -10702,8 +10814,8 @@
         </p:nvSpPr>
         <p:spPr>
           <a:xfrm>
-            <a:off x="548640" y="5828538"/>
-            <a:ext cx="11094415" cy="435102"/>
+            <a:off x="548640" y="5665851"/>
+            <a:ext cx="11094415" cy="597789"/>
           </a:xfrm>
           <a:prstGeom prst="rect">
             <a:avLst/>
@@ -10741,7 +10853,7 @@
                 <a:ea typeface="Calibri" pitchFamily="34" charset="-122"/>
                 <a:cs typeface="Calibri" pitchFamily="34" charset="-120"/>
               </a:rPr>
-              <a:t>One AeroLink stakeholder in the generated model: keyword, short name (the Phase I ID), name. Checked (PASS).</a:t>
+              <a:t>One AeroLink stakeholder declaration taken apart: keyword, short name (the Phase I ID) and name; the same element as a box; a reference by short name; and the recorded failure of an unquoted ID from the intentionally invalid tool-proof file. Checked (PASS; the invalid file FAIL, as intended).</a:t>
             </a:r>
             <a:endParaRPr lang="en-US" sz="1050" dirty="0"/>
           </a:p>
@@ -10819,7 +10931,7 @@
       </p:sp>
       <p:pic>
         <p:nvPicPr>
-          <p:cNvPr id="4" name="Image 0" descr="Listing (file sysml/lectures/week08/aerolink_context_stakeholders_v01.sysml, checked: PASS): part def &lt;'STK-005'&gt; 'Vertiport operators' {     doc /* … */     @StakeholderAssessment { interest = 5; influence = 4; influenceReason = &quot;Own a scarce capacity constraint (pads, chargers)&quot;; support = 3; supportReason = &quot;Gain traffic from the service; want throughput protected&quot;; } }">    </p:cNvPr>
+          <p:cNvPr id="4" name="Image 0" descr="At the top, the declaration part def &lt;'STK-005'&gt; 'Vertiport operators' { in a code strip, with three brackets under it: keyword; short name: the Phase I ID; name: the register wording. A line explains: quoted: the ID has a hyphen, the name a space. Below, the same element in the graphical notation: a square-cornered box «part def» &lt;'STK-005'&gt; 'Vertiport operators'. Bottom left, a card: a reference uses the short name: Stakeholders::'STK-005'. Bottom right, a warning card: intentionally invalid (recorded FAIL): &lt;EXT-001&gt; unquoted, FAIL at the hyphen, 9:12.">    </p:cNvPr>
           <p:cNvPicPr>
             <a:picLocks noChangeAspect="1"/>
           </p:cNvPicPr>
@@ -10833,8 +10945,8 @@
         </p:blipFill>
         <p:spPr>
           <a:xfrm>
-            <a:off x="548640" y="2791726"/>
-            <a:ext cx="6379289" cy="1388086"/>
+            <a:off x="770857" y="1280160"/>
+            <a:ext cx="5934856" cy="4248531"/>
           </a:xfrm>
           <a:prstGeom prst="rect">
             <a:avLst/>
@@ -10899,7 +11011,35 @@
                 <a:ea typeface="Calibri" pitchFamily="34" charset="-122"/>
                 <a:cs typeface="Calibri" pitchFamily="34" charset="-120"/>
               </a:rPr>
-              <a:t>Declaration order: short name in `&lt; &gt;`, then name</a:t>
+              <a:t>Declaration order: short name in </a:t>
+            </a:r>
+            <a:pPr indent="0" marL="0">
+              <a:buNone/>
+            </a:pPr>
+            <a:r>
+              <a:rPr lang="en-US" sz="2000" dirty="0">
+                <a:solidFill>
+                  <a:srgbClr val="18202D"/>
+                </a:solidFill>
+                <a:latin typeface="Consolas" pitchFamily="34" charset="0"/>
+                <a:ea typeface="Consolas" pitchFamily="34" charset="-122"/>
+                <a:cs typeface="Consolas" pitchFamily="34" charset="-120"/>
+              </a:rPr>
+              <a:t>&lt; &gt;</a:t>
+            </a:r>
+            <a:pPr indent="0" marL="0">
+              <a:buNone/>
+            </a:pPr>
+            <a:r>
+              <a:rPr lang="en-US" sz="2000" dirty="0">
+                <a:solidFill>
+                  <a:srgbClr val="18202D"/>
+                </a:solidFill>
+                <a:latin typeface="Calibri" pitchFamily="34" charset="0"/>
+                <a:ea typeface="Calibri" pitchFamily="34" charset="-122"/>
+                <a:cs typeface="Calibri" pitchFamily="34" charset="-120"/>
+              </a:rPr>
+              <a:t>, then name</a:t>
             </a:r>
             <a:endParaRPr lang="en-US" sz="2000" dirty="0"/>
           </a:p>
@@ -10958,89 +11098,6 @@
               <a:t> each Phase I ID is a quoted short name</a:t>
             </a:r>
             <a:endParaRPr lang="en-US" sz="2000" dirty="0"/>
-          </a:p>
-        </p:txBody>
-      </p:sp>
-      <p:sp>
-        <p:nvSpPr>
-          <p:cNvPr id="6" name="Shape 3"/>
-          <p:cNvSpPr/>
-          <p:nvPr/>
-        </p:nvSpPr>
-        <p:spPr>
-          <a:xfrm>
-            <a:off x="7293689" y="4362704"/>
-            <a:ext cx="4349366" cy="1057148"/>
-          </a:xfrm>
-          <a:prstGeom prst="roundRect">
-            <a:avLst>
-              <a:gd name="adj" fmla="val 5190"/>
-            </a:avLst>
-          </a:prstGeom>
-          <a:solidFill>
-            <a:srgbClr val="FBEFD9"/>
-          </a:solidFill>
-          <a:ln w="12700">
-            <a:solidFill>
-              <a:srgbClr val="8A5200"/>
-            </a:solidFill>
-            <a:prstDash val="solid"/>
-          </a:ln>
-        </p:spPr>
-      </p:sp>
-      <p:sp>
-        <p:nvSpPr>
-          <p:cNvPr id="7" name="Text 4"/>
-          <p:cNvSpPr/>
-          <p:nvPr/>
-        </p:nvSpPr>
-        <p:spPr>
-          <a:xfrm>
-            <a:off x="7430849" y="4362704"/>
-            <a:ext cx="4075046" cy="1057148"/>
-          </a:xfrm>
-          <a:prstGeom prst="rect">
-            <a:avLst/>
-          </a:prstGeom>
-          <a:noFill/>
-          <a:ln/>
-        </p:spPr>
-        <p:txBody>
-          <a:bodyPr wrap="square" lIns="38100" tIns="38100" rIns="38100" bIns="38100" rtlCol="0" anchor="ctr"/>
-          <a:lstStyle/>
-          <a:p>
-            <a:pPr indent="0" marL="0">
-              <a:buNone/>
-            </a:pPr>
-            <a:r>
-              <a:rPr lang="en-US" sz="1200" b="1" spc="100" kern="0" dirty="0">
-                <a:solidFill>
-                  <a:srgbClr val="18202D"/>
-                </a:solidFill>
-                <a:latin typeface="Calibri" pitchFamily="34" charset="0"/>
-                <a:ea typeface="Calibri" pitchFamily="34" charset="-122"/>
-                <a:cs typeface="Calibri" pitchFamily="34" charset="-120"/>
-              </a:rPr>
-              <a:t>CAUTION</a:t>
-            </a:r>
-            <a:endParaRPr lang="en-US" sz="1200" dirty="0"/>
-          </a:p>
-          <a:p>
-            <a:pPr indent="0" marL="0">
-              <a:buNone/>
-            </a:pPr>
-            <a:r>
-              <a:rPr lang="en-US" sz="1700" dirty="0">
-                <a:solidFill>
-                  <a:srgbClr val="18202D"/>
-                </a:solidFill>
-                <a:latin typeface="Calibri" pitchFamily="34" charset="0"/>
-                <a:ea typeface="Calibri" pitchFamily="34" charset="-122"/>
-                <a:cs typeface="Calibri" pitchFamily="34" charset="-120"/>
-              </a:rPr>
-              <a:t>Recorded result: `&lt;EXT-001&gt;` unquoted fails at the hyphen.</a:t>
-            </a:r>
-            <a:endParaRPr lang="en-US" sz="1200" dirty="0"/>
           </a:p>
         </p:txBody>
       </p:sp>
@@ -11125,8 +11182,8 @@
         </p:nvSpPr>
         <p:spPr>
           <a:xfrm>
-            <a:off x="548640" y="5828538"/>
-            <a:ext cx="11094415" cy="435102"/>
+            <a:off x="548640" y="5665851"/>
+            <a:ext cx="11094415" cy="597789"/>
           </a:xfrm>
           <a:prstGeom prst="rect">
             <a:avLst/>
@@ -11164,7 +11221,7 @@
                 <a:ea typeface="Calibri" pitchFamily="34" charset="-122"/>
                 <a:cs typeface="Calibri" pitchFamily="34" charset="-120"/>
               </a:rPr>
-              <a:t>Comments, a note and documentation, quoted from the SysML v2 textual-notation training deck. Checked (PASS).</a:t>
+              <a:t>The training deck’s comment, documentation and note examples (slides 7–8) as a diagram: the comment and the doc are in the model; the note is text only. Checked (PASS).</a:t>
             </a:r>
             <a:endParaRPr lang="en-US" sz="1050" dirty="0"/>
           </a:p>
@@ -11242,7 +11299,7 @@
       </p:sp>
       <p:pic>
         <p:nvPicPr>
-          <p:cNvPr id="4" name="Image 0" descr="Listing (file sysml/lectures/week08/deck_quotes_textual_notation.sysml, checked: PASS): /* This is comment, part of the model,  * annotating (by default) it's owning package. */ comment Comment1 /* This is a named comment. */ comment about Automobile /* This is an unnamed comment, annotating an  * explicitly specified element. */ part def Automobile; alias Car for Automobile {     /* This is a comment annotating its owning      * element. */ } // This is a note. It is in the text, but not part // of the model. alias Torque for ISQ::TorqueValue;  part def Automobile {     doc Document1     /* This is documentation of Automobile. */ }">    </p:cNvPr>
+          <p:cNvPr id="4" name="Image 0" descr="Two package folders side by side. Left, 'Comment Example': a square-cornered box «part def» Automobile joined by a dashed line to a comment note with a folded corner: This is an unnamed comment, annotating an explicitly specified element; labeled comment about Automobile: in the model. Right, 'Documentation Example': a box «part def» Automobile with a doc compartment: This is documentation of Automobile; labeled doc: owned by the element it documents. Below both, a dashed, greyed strip with the two note lines // This is a note. It is in the text, // but not part of the model, labeled note: text only, not in the model.">    </p:cNvPr>
           <p:cNvPicPr>
             <a:picLocks noChangeAspect="1"/>
           </p:cNvPicPr>
@@ -11256,8 +11313,8 @@
         </p:blipFill>
         <p:spPr>
           <a:xfrm>
-            <a:off x="548640" y="1580560"/>
-            <a:ext cx="6379289" cy="3810417"/>
+            <a:off x="548640" y="1410307"/>
+            <a:ext cx="6379289" cy="3988237"/>
           </a:xfrm>
           <a:prstGeom prst="rect">
             <a:avLst/>
@@ -11297,25 +11354,11 @@
                 <a:solidFill>
                   <a:srgbClr val="18202D"/>
                 </a:solidFill>
-                <a:latin typeface="Calibri" pitchFamily="34" charset="0"/>
-                <a:ea typeface="Calibri" pitchFamily="34" charset="-122"/>
-                <a:cs typeface="Calibri" pitchFamily="34" charset="-120"/>
-              </a:rPr>
-              <a:t>`/</a:t>
-            </a:r>
-            <a:pPr indent="0" marL="0">
-              <a:buNone/>
-            </a:pPr>
-            <a:r>
-              <a:rPr lang="en-US" sz="2000" i="1" dirty="0">
-                <a:solidFill>
-                  <a:srgbClr val="18202D"/>
-                </a:solidFill>
-                <a:latin typeface="Calibri" pitchFamily="34" charset="0"/>
-                <a:ea typeface="Calibri" pitchFamily="34" charset="-122"/>
-                <a:cs typeface="Calibri" pitchFamily="34" charset="-120"/>
-              </a:rPr>
-              <a:t> … </a:t>
+                <a:latin typeface="Consolas" pitchFamily="34" charset="0"/>
+                <a:ea typeface="Consolas" pitchFamily="34" charset="-122"/>
+                <a:cs typeface="Consolas" pitchFamily="34" charset="-120"/>
+              </a:rPr>
+              <a:t>/* … */</a:t>
             </a:r>
             <a:pPr indent="0" marL="0">
               <a:buNone/>
@@ -11329,7 +11372,7 @@
                 <a:ea typeface="Calibri" pitchFamily="34" charset="-122"/>
                 <a:cs typeface="Calibri" pitchFamily="34" charset="-120"/>
               </a:rPr>
-              <a:t>/` comment: part of the model</a:t>
+              <a:t> comment: part of the model</a:t>
             </a:r>
             <a:endParaRPr lang="en-US" sz="2000" dirty="0"/>
           </a:p>
@@ -11346,11 +11389,25 @@
                 <a:solidFill>
                   <a:srgbClr val="18202D"/>
                 </a:solidFill>
-                <a:latin typeface="Calibri" pitchFamily="34" charset="0"/>
-                <a:ea typeface="Calibri" pitchFamily="34" charset="-122"/>
-                <a:cs typeface="Calibri" pitchFamily="34" charset="-120"/>
-              </a:rPr>
-              <a:t>`// …` note: in the text, not in the model</a:t>
+                <a:latin typeface="Consolas" pitchFamily="34" charset="0"/>
+                <a:ea typeface="Consolas" pitchFamily="34" charset="-122"/>
+                <a:cs typeface="Consolas" pitchFamily="34" charset="-120"/>
+              </a:rPr>
+              <a:t>// …</a:t>
+            </a:r>
+            <a:pPr indent="0" marL="0">
+              <a:buNone/>
+            </a:pPr>
+            <a:r>
+              <a:rPr lang="en-US" sz="2000" dirty="0">
+                <a:solidFill>
+                  <a:srgbClr val="18202D"/>
+                </a:solidFill>
+                <a:latin typeface="Calibri" pitchFamily="34" charset="0"/>
+                <a:ea typeface="Calibri" pitchFamily="34" charset="-122"/>
+                <a:cs typeface="Calibri" pitchFamily="34" charset="-120"/>
+              </a:rPr>
+              <a:t> note: in the text, not in the model</a:t>
             </a:r>
             <a:endParaRPr lang="en-US" sz="2000" dirty="0"/>
           </a:p>
@@ -11367,25 +11424,11 @@
                 <a:solidFill>
                   <a:srgbClr val="18202D"/>
                 </a:solidFill>
-                <a:latin typeface="Calibri" pitchFamily="34" charset="0"/>
-                <a:ea typeface="Calibri" pitchFamily="34" charset="-122"/>
-                <a:cs typeface="Calibri" pitchFamily="34" charset="-120"/>
-              </a:rPr>
-              <a:t>`doc /</a:t>
-            </a:r>
-            <a:pPr indent="0" marL="0">
-              <a:buNone/>
-            </a:pPr>
-            <a:r>
-              <a:rPr lang="en-US" sz="2000" i="1" dirty="0">
-                <a:solidFill>
-                  <a:srgbClr val="18202D"/>
-                </a:solidFill>
-                <a:latin typeface="Calibri" pitchFamily="34" charset="0"/>
-                <a:ea typeface="Calibri" pitchFamily="34" charset="-122"/>
-                <a:cs typeface="Calibri" pitchFamily="34" charset="-120"/>
-              </a:rPr>
-              <a:t> … </a:t>
+                <a:latin typeface="Consolas" pitchFamily="34" charset="0"/>
+                <a:ea typeface="Consolas" pitchFamily="34" charset="-122"/>
+                <a:cs typeface="Consolas" pitchFamily="34" charset="-120"/>
+              </a:rPr>
+              <a:t>doc /* … */</a:t>
             </a:r>
             <a:pPr indent="0" marL="0">
               <a:buNone/>
@@ -11399,7 +11442,7 @@
                 <a:ea typeface="Calibri" pitchFamily="34" charset="-122"/>
                 <a:cs typeface="Calibri" pitchFamily="34" charset="-120"/>
               </a:rPr>
-              <a:t>/`: owned by the element it documents</a:t>
+              <a:t>: owned by the element it documents</a:t>
             </a:r>
             <a:endParaRPr lang="en-US" sz="2000" dirty="0"/>
           </a:p>
@@ -11434,7 +11477,21 @@
                 <a:ea typeface="Calibri" pitchFamily="34" charset="-122"/>
                 <a:cs typeface="Calibri" pitchFamily="34" charset="-120"/>
               </a:rPr>
-              <a:t> register text with no modeled attribute goes into `doc`</a:t>
+              <a:t> register text with no modeled attribute goes into </a:t>
+            </a:r>
+            <a:pPr indent="0" marL="0">
+              <a:buNone/>
+            </a:pPr>
+            <a:r>
+              <a:rPr lang="en-US" sz="2000" dirty="0">
+                <a:solidFill>
+                  <a:srgbClr val="18202D"/>
+                </a:solidFill>
+                <a:latin typeface="Consolas" pitchFamily="34" charset="0"/>
+                <a:ea typeface="Consolas" pitchFamily="34" charset="-122"/>
+                <a:cs typeface="Consolas" pitchFamily="34" charset="-120"/>
+              </a:rPr>
+              <a:t>doc</a:t>
             </a:r>
             <a:endParaRPr lang="en-US" sz="2000" dirty="0"/>
           </a:p>
@@ -11560,7 +11617,7 @@
                 <a:ea typeface="Calibri" pitchFamily="34" charset="-122"/>
                 <a:cs typeface="Calibri" pitchFamily="34" charset="-120"/>
               </a:rPr>
-              <a:t>The course toolchain (course convention): text in, checker decides validity, views and the lab tool support the work.</a:t>
+              <a:t>The course toolchain (course convention): text in, checker decides validity, views and the Phase I export tool support the work.</a:t>
             </a:r>
             <a:endParaRPr lang="en-US" sz="1050" dirty="0"/>
           </a:p>
@@ -11646,7 +11703,7 @@
       </p:sp>
       <p:pic>
         <p:nvPicPr>
-          <p:cNvPr id="5" name="Image 0" descr="A left-to-right flow of five boxes joined by arrows. Box 1: 'Editor or SysML notebook (textual notation)'. Arrow labeled 'save' to box 2: 'team-NN-model-v01.sysml (one file per version)'. Arrow labeled 'check' to box 3, drawn bold: 'Course-designated checker: OMG SysML v2 Pilot Implementation, release 2026-08 (pilot of the 2.1 Beta 2 texts)'. Arrow to box 4: 'Log: PASS or FAIL, with ERROR and WARNING lines'. Under the flow, a second row: box 5 'Week 8 lab tool (in this app): import the Team Record, mapping table, findings, preview, export .sysml' with an arrow up into box 2 labeled 'generates the first draft'; beside it box 6 'AeroLink engineering model page (instructor example)'. Above box 1, a dashed box 'Eclipse SysON (optional, graphical editing)' with a dashed arrow into box 2. A footnote: grades follow the instructor's checker run.">    </p:cNvPr>
+          <p:cNvPr id="5" name="Image 0" descr="On the left, a top-to-bottom flow of four boxes joined by arrows. Box 1: 'Editor or SysML notebook (textual notation)'. Arrow labeled 'save' to box 2: 'team-NN-model-v01.sysml (one file per version)'. Arrow labeled 'check' to box 3, drawn bold: 'Course-designated checker: OMG SysML v2 Pilot Implementation, release 2026-08 (pilot of the 2.1 Beta 2 texts)'. Arrow to box 4: 'Log: PASS or FAIL, with ERROR and WARNING lines'. On the right, a column of three boxes: at the top a dashed box 'Eclipse SysON (optional, graphical editing)' with a dashed arrow into box 2; below it box 5 'Phase I export tool (in this app): import your Phase I exports, mapping table, findings, preview, export .sysml' with an arrow into box 2 labeled 'generates the first draft'; below that box 6 'AeroLink engineering model page (instructor example)'. A footnote: grades follow the instructor's checker run.">    </p:cNvPr>
           <p:cNvPicPr>
             <a:picLocks noChangeAspect="1"/>
           </p:cNvPicPr>
@@ -11660,8 +11717,8 @@
         </p:blipFill>
         <p:spPr>
           <a:xfrm>
-            <a:off x="548640" y="2083098"/>
-            <a:ext cx="6379289" cy="3242348"/>
+            <a:off x="548640" y="1710154"/>
+            <a:ext cx="6379289" cy="3988237"/>
           </a:xfrm>
           <a:prstGeom prst="rect">
             <a:avLst/>
@@ -11747,7 +11804,7 @@
                 <a:ea typeface="Calibri" pitchFamily="34" charset="-122"/>
                 <a:cs typeface="Calibri" pitchFamily="34" charset="-120"/>
               </a:rPr>
-              <a:t>The Week 8 lab tool imports your record and drafts the skeleton</a:t>
+              <a:t>The Phase I export tool imports your record and drafts the skeleton</a:t>
             </a:r>
             <a:endParaRPr lang="en-US" sz="2000" dirty="0"/>
           </a:p>
@@ -11986,8 +12043,8 @@
         </p:blipFill>
         <p:spPr>
           <a:xfrm>
-            <a:off x="548640" y="1791798"/>
-            <a:ext cx="6379289" cy="3387942"/>
+            <a:off x="548640" y="1384239"/>
+            <a:ext cx="6379289" cy="4203060"/>
           </a:xfrm>
           <a:prstGeom prst="rect">
             <a:avLst/>
@@ -12220,7 +12277,7 @@
                 <a:ea typeface="Calibri" pitchFamily="34" charset="-122"/>
                 <a:cs typeface="Calibri" pitchFamily="34" charset="-120"/>
               </a:rPr>
-              <a:t>Every artifact of the package gets a home in the model; the Week 1 stakeholder register is modeled now, the rest is mapped to the week that models it (course convention).</a:t>
+              <a:t>Every artifact of the package gets a home in the model; the Week 1 stakeholder register is modeled now, the rest is mapped to the week that models it (course convention). AROU: Assumptions, Risks, Opportunities and Unknowns.</a:t>
             </a:r>
             <a:endParaRPr lang="en-US" sz="1050" dirty="0"/>
           </a:p>
@@ -12298,7 +12355,7 @@
       </p:sp>
       <p:pic>
         <p:nvPicPr>
-          <p:cNvPr id="4" name="Image 0" descr="Left: a document stack titled 'Systems Thinking Engineering Package (Week 7)' listing its parts: Week 1 register (ENT, EXT, PRT, STK, CON, REL, MGO, NEED); Week 2 ConOps and requirements; Week 3 technology, risk, trade study; Week 4 architecture; Week 5 components and interfaces; Week 6 roadmap. Right: a column of package boxes: Context, Stakeholders, Physical, Needs, Requirements, Behavior, Logical, Verification, Analysis, AROU, Evolution. Solid thick arrows run from the Week 1 register to Context, Stakeholders and Physical, labeled 'modeled now'. Dashed arrows run from the other parts to the other packages, each labeled with the week that models them: Needs and Requirements 'Week 9', Behavior and Logical 'Week 10', Physical components 'Week 11', Verification 'Week 12', Analysis and AROU 'Week 13', the Week 6 roadmap to Evolution 'Week 14'.">    </p:cNvPr>
+          <p:cNvPr id="4" name="Image 0" descr="Left: a document stack titled 'Systems Thinking Engineering Package (Week 7)' listing its parts: Week 1 register (ENT, EXT, PRT, STK, CON, REL, MGO, NEED); Week 2 ConOps and requirements; Week 3 technology, risk, trade study; Week 4 architecture; Week 5 components and interfaces; Week 6 roadmap. Right: a column of package boxes: Context, Stakeholders, Physical, Needs, Requirements, Behavior, Logical, Verification, Analysis, AROU (Assumptions, Risks, Opportunities and Unknowns), Evolution. Solid thick arrows run from the Week 1 register to Context, Stakeholders and Physical, labeled 'modeled now'. Dashed arrows run from the other parts to the other packages, each labeled with the week that models them: Needs and Requirements 'Week 9', Behavior and Logical 'Week 10', Physical components 'Week 11', Verification 'Week 12', Analysis and AROU 'Week 13', the Week 6 roadmap to Evolution 'Week 14'.">    </p:cNvPr>
           <p:cNvPicPr>
             <a:picLocks noChangeAspect="1"/>
           </p:cNvPicPr>
@@ -12312,8 +12369,8 @@
         </p:blipFill>
         <p:spPr>
           <a:xfrm>
-            <a:off x="548640" y="1661935"/>
-            <a:ext cx="6379289" cy="3484982"/>
+            <a:off x="770857" y="1280160"/>
+            <a:ext cx="5934856" cy="4248531"/>
           </a:xfrm>
           <a:prstGeom prst="rect">
             <a:avLst/>
